--- a/reports/2026-10-17/YouTube_AI趨勢研究雷達_2026-10-17_簡報.pptx
+++ b/reports/2026-10-17/YouTube_AI趨勢研究雷達_2026-10-17_簡報.pptx
@@ -3257,37 +3257,37 @@
           <a:lstStyle/>
           <a:p>
             <a:r>
-              <a:t>1. 為什麼我勸你別再學 AI 賺錢？真正值錢的是這個｜42,506</a:t>
-            </a:r>
-          </a:p>
-          <a:p>
-            <a:r>
-              <a:t>2. 博通CEO：買AI股等於賭徒？Open AI 收入少了200億引發市場恐慌？#經濟前James｜29,213</a:t>
-            </a:r>
-          </a:p>
-          <a:p>
-            <a:r>
-              <a:t>3. 马斯克为之疯狂！史上最会‘赚钱’的AI出现了！#AI #AI工具 #马斯克 #AI tool｜28,571</a:t>
-            </a:r>
-          </a:p>
-          <a:p>
-            <a:r>
-              <a:t>4. The New Way To Make Money With AI T-Shirts｜24,679</a:t>
-            </a:r>
-          </a:p>
-          <a:p>
-            <a:r>
-              <a:t>5. AIで動画生成する時に知っておきたい専門用語｜20,514</a:t>
-            </a:r>
-          </a:p>
-          <a:p>
-            <a:r>
-              <a:t>6. 【これ1本で全部わかる❗️】2026年最新❗️編集ソフトは一切不要‼️動画編集をAIに丸投げしてお金を稼ぐ方法｜15,138</a:t>
-            </a:r>
-          </a:p>
-          <a:p>
-            <a:r>
-              <a:t>7. GPU价格太高，本地部署AI能赚钱吗？主播实际经验分享，AI音视频频道养活自己，帮助客户部署AI，两周收入抵得｜13,143</a:t>
+              <a:t>1. 為什麼我勸你別再學 AI 賺錢？真正值錢的是這個｜42,983</a:t>
+            </a:r>
+          </a:p>
+          <a:p>
+            <a:r>
+              <a:t>2. 博通CEO：買AI股等於賭徒？Open AI 收入少了200億引發市場恐慌？#經濟前James｜29,251</a:t>
+            </a:r>
+          </a:p>
+          <a:p>
+            <a:r>
+              <a:t>3. 马斯克为之疯狂！史上最会‘赚钱’的AI出现了！#AI #AI工具 #马斯克 #AI tool｜28,656</a:t>
+            </a:r>
+          </a:p>
+          <a:p>
+            <a:r>
+              <a:t>4. The New Way To Make Money With AI T-Shirts｜24,998</a:t>
+            </a:r>
+          </a:p>
+          <a:p>
+            <a:r>
+              <a:t>5. AIで動画生成する時に知っておきたい専門用語｜20,551</a:t>
+            </a:r>
+          </a:p>
+          <a:p>
+            <a:r>
+              <a:t>6. 【これ1本で全部わかる❗️】2026年最新❗️編集ソフトは一切不要‼️動画編集をAIに丸投げしてお金を稼ぐ方法｜15,233</a:t>
+            </a:r>
+          </a:p>
+          <a:p>
+            <a:r>
+              <a:t>7. GPU价格太高，本地部署AI能赚钱吗？主播实际经验分享，AI音视频频道养活自己，帮助客户部署AI，两周收入抵得｜13,196</a:t>
             </a:r>
           </a:p>
         </p:txBody>

--- a/reports/2026-10-17/YouTube_AI趨勢研究雷達_2026-10-17_簡報.pptx
+++ b/reports/2026-10-17/YouTube_AI趨勢研究雷達_2026-10-17_簡報.pptx
@@ -3192,7 +3192,7 @@
           <a:lstStyle/>
           <a:p>
             <a:r>
-              <a:t>近72h去重樣本：40</a:t>
+              <a:t>近72h去重樣本：39</a:t>
             </a:r>
           </a:p>
           <a:p>
@@ -3257,37 +3257,37 @@
           <a:lstStyle/>
           <a:p>
             <a:r>
-              <a:t>1. 為什麼我勸你別再學 AI 賺錢？真正值錢的是這個｜42,983</a:t>
-            </a:r>
-          </a:p>
-          <a:p>
-            <a:r>
-              <a:t>2. 博通CEO：買AI股等於賭徒？Open AI 收入少了200億引發市場恐慌？#經濟前James｜29,251</a:t>
-            </a:r>
-          </a:p>
-          <a:p>
-            <a:r>
-              <a:t>3. 马斯克为之疯狂！史上最会‘赚钱’的AI出现了！#AI #AI工具 #马斯克 #AI tool｜28,656</a:t>
-            </a:r>
-          </a:p>
-          <a:p>
-            <a:r>
-              <a:t>4. The New Way To Make Money With AI T-Shirts｜24,998</a:t>
-            </a:r>
-          </a:p>
-          <a:p>
-            <a:r>
-              <a:t>5. AIで動画生成する時に知っておきたい専門用語｜20,551</a:t>
-            </a:r>
-          </a:p>
-          <a:p>
-            <a:r>
-              <a:t>6. 【これ1本で全部わかる❗️】2026年最新❗️編集ソフトは一切不要‼️動画編集をAIに丸投げしてお金を稼ぐ方法｜15,233</a:t>
-            </a:r>
-          </a:p>
-          <a:p>
-            <a:r>
-              <a:t>7. GPU价格太高，本地部署AI能赚钱吗？主播实际经验分享，AI音视频频道养活自己，帮助客户部署AI，两周收入抵得｜13,196</a:t>
+              <a:t>1. 為什麼我勸你別再學 AI 賺錢？真正值錢的是這個｜67,820</a:t>
+            </a:r>
+          </a:p>
+          <a:p>
+            <a:r>
+              <a:t>2. The New Way To Make Money With AI T-Shirts｜30,728</a:t>
+            </a:r>
+          </a:p>
+          <a:p>
+            <a:r>
+              <a:t>3. 【神機能】Opus5.5がヤバすぎたので徹底解説しました【Claude Code】｜23,747</a:t>
+            </a:r>
+          </a:p>
+          <a:p>
+            <a:r>
+              <a:t>4. THE #1 A.I.  PASSIVE INCOME SIDE HUSTLE FOR 2027｜14,005</a:t>
+            </a:r>
+          </a:p>
+          <a:p>
+            <a:r>
+              <a:t>5. 【2026年最新】中学生からYouTube！？ChatGPTで月●●万円稼ぐ方法！顔出し・声出し無し！超初心者｜7,785</a:t>
+            </a:r>
+          </a:p>
+          <a:p>
+            <a:r>
+              <a:t>6. i need the last girls JOB!! #miami #higgsfieldpartner #｜7,566</a:t>
+            </a:r>
+          </a:p>
+          <a:p>
+            <a:r>
+              <a:t>7. 【ガチ検証】AIの助言だけで2週間起業した男の末路がヤバ過ぎた。｜7,417</a:t>
             </a:r>
           </a:p>
         </p:txBody>
@@ -3609,7 +3609,7 @@
         <p:spPr>
           <a:xfrm>
             <a:off x="548640" y="1005840"/>
-            <a:ext cx="8046720" cy="7335895"/>
+            <a:ext cx="8046720" cy="7412935"/>
           </a:xfrm>
           <a:prstGeom prst="rect">
             <a:avLst/>
